--- a/decks/englang-opinion/englang-opinion_ch1_audience-purpose-form.pptx
+++ b/decks/englang-opinion/englang-opinion_ch1_audience-purpose-form.pptx
@@ -125,29 +125,29 @@
   <p:extLst>
     <p:ext uri="{521415D9-36F7-43E2-AB2F-B90AF26B5E84}">
       <p14:sectionLst xmlns:p14="http://schemas.microsoft.com/office/powerpoint/2010/main">
-        <p14:section name="Opening" id="{73e54208-06f5-f0c1-d462-8ff4bee666cc}">
+        <p14:section name="Opening" id="{ed2bc286-2d01-4b85-3285-90f364ec86f7}">
           <p14:sldIdLst>
             <p14:sldId id="256"/>
           </p14:sldIdLst>
         </p14:section>
-        <p14:section name="Gate" id="{1ed841b7-c44b-5eab-4438-da4f5f78e3c6}">
+        <p14:section name="Gate" id="{af3a56c1-4a6f-ab85-ccfa-0995a3eda51f}">
           <p14:sldIdLst>
             <p14:sldId id="257"/>
             <p14:sldId id="258"/>
           </p14:sldIdLst>
         </p14:section>
-        <p14:section name="Pre-teach" id="{1f42176a-8000-7fc8-ac8b-80c730f44c89}">
+        <p14:section name="Pre-teach" id="{c9ee3b58-4d9a-3178-81d9-c9f60ae06643}">
           <p14:sldIdLst>
             <p14:sldId id="259"/>
           </p14:sldIdLst>
         </p14:section>
-        <p14:section name="Read-along" id="{52349e1d-424a-ce47-88f2-785fadf7355a}">
+        <p14:section name="Read-along" id="{c720de70-64bb-549c-0e5c-0d3668f10d75}">
           <p14:sldIdLst>
             <p14:sldId id="260"/>
             <p14:sldId id="261"/>
           </p14:sldIdLst>
         </p14:section>
-        <p14:section name="Teach" id="{0006866f-5794-6667-16e6-4bf620c88b00}">
+        <p14:section name="Teach" id="{ed13ae23-3e68-0047-9778-659bd428af0b}">
           <p14:sldIdLst>
             <p14:sldId id="262"/>
             <p14:sldId id="263"/>
@@ -156,7 +156,7 @@
             <p14:sldId id="266"/>
           </p14:sldIdLst>
         </p14:section>
-        <p14:section name="Routes" id="{ec209a94-579e-a4b6-904e-eafc37ef904b}">
+        <p14:section name="Routes" id="{87e47615-409e-9768-9a6e-98b470b3e7f1}">
           <p14:sldIdLst>
             <p14:sldId id="267"/>
             <p14:sldId id="268"/>
@@ -164,12 +164,12 @@
             <p14:sldId id="270"/>
           </p14:sldIdLst>
         </p14:section>
-        <p14:section name="Close" id="{4a628ebb-2221-ba3d-90f6-1eaebdf81643}">
+        <p14:section name="Close" id="{e66fa65e-559b-1c2d-c83e-c98caedc31f6}">
           <p14:sldIdLst>
             <p14:sldId id="271"/>
           </p14:sldIdLst>
         </p14:section>
-        <p14:section name="Answers" id="{68f96629-1ddf-b64b-9608-dd6373b6052c}">
+        <p14:section name="Answers" id="{673c412e-77f2-17f7-2b71-87f2aca2eee2}">
           <p14:sldIdLst>
             <p14:sldId id="272"/>
             <p14:sldId id="273"/>
@@ -1235,7 +1235,7 @@
               <a:rPr lang="en-US" dirty="0"/>
               <a:t>Exit ticket — individual, silent, on a slip or mini-whiteboard. Recall before help: no notes, no lanes, no hints. Collect before pupils leave.
 Question: Which question finds the purpose of a piece of writing?
-Answer: A   Why am I writing it?. Purpose is why you are writing: to inform, persuade, entertain or advise. Audience is who, and form is what type of text.
+Answer: B   Why am I writing it?. Purpose is why you are writing: to inform, persuade, entertain or advise. Audience is who, and form is what type of text.
 Source of this question: gate item 1 re-asked (options rotated) — this chapter has no third quick-check module.
 The ebook also holds task 3, "Writing practice: a mini-review for one audience", for homework or the next lesson's do now.
 Sort the slips: correct → ready to move on; incorrect → start next lesson in the pre-teach group, with the read-along and the Support lane. Same destination next time.</a:t>
@@ -1418,7 +1418,7 @@
             <a:r>
               <a:rPr lang="en-US" dirty="0"/>
               <a:t>Answers — task 2: Spot the audience. Reveal the answer; pupils mark their own work in a different colour, then read the "why" together. Same destination for every lane, so one answer serves the whole class.
-Answer: B   “Staff checked every child’s wristband, the safety talk was clear”
+Answer: D   “Staff checked every child’s wristband, the safety talk was clear”
 Why: Wristbands and a clear safety talk reassure parents. The other three details are written to excite teenagers.
 Ask a Support pupil to explain one step, and a Stretch pupil to share their extension.</a:t>
             </a:r>
@@ -1509,7 +1509,7 @@
             <a:r>
               <a:rPr lang="en-US" dirty="0"/>
               <a:t>Answers — exit ticket: Exit ticket. Reveal the answer; pupils mark their own work in a different colour, then read the "why" together. Same destination for every lane, so one answer serves the whole class.
-Answer: A   Why am I writing it?
+Answer: B   Why am I writing it?
 Why: Purpose is why you are writing: to inform, persuade, entertain or advise. Audience is who, and form is what type of text.
 Ask a Support pupil to explain one step, and a Stretch pupil to share their extension.</a:t>
             </a:r>
@@ -1600,9 +1600,9 @@
             <a:r>
               <a:rPr lang="en-US" dirty="0"/>
               <a:t>Do now — retrieval. Silent, no notes, no help: recall comes before any support. Give about four minutes.
-1. Which question finds the purpose of a piece of writing?  →  B   Why am I writing it?
+1. Which question finds the purpose of a piece of writing?  →  C   Why am I writing it?
 2. The ___ of a text is the people it is written for.  →  audience
-3. What is the main purpose of a review?  →  B   To inform the reader about an experience and help them decide
+3. What is the main purpose of a review?  →  D   To inform the reader about an experience and help them decide
 Circulate: who gets 3/3 (Stretch route), 2/3 (Core), 0–1 (Support)? Use this to route pupils later in the lesson.</a:t>
             </a:r>
             <a:endParaRPr lang="en-US" dirty="0"/>
@@ -1692,9 +1692,9 @@
             <a:r>
               <a:rPr lang="en-US" dirty="0"/>
               <a:t>Answers — pupils mark their own in a different colour, then hands up for 3/3, 2/3, 1/3.
-1. B   Why am I writing it?. Purpose is why you are writing: to inform, persuade, entertain or advise. Audience is who, and form is what type of text.
+1. C   Why am I writing it?. Purpose is why you are writing: to inform, persuade, entertain or advise. Audience is who, and form is what type of text.
 2. audience. The audience is who you are writing for; it decides your tone.
-3. B   To inform the reader about an experience and help them decide. A review informs the reader about a real experience and helps them make a decision, persuading a little along the way.
+3. D   To inform the reader about an experience and help them decide. A review informs the reader about a real experience and helps them make a decision, persuading a little along the way.
 Say the route each score points to: 3/3 Stretch, 2/3 Core, 0–1 Support. Pupils may choose to move up.</a:t>
             </a:r>
             <a:endParaRPr lang="en-US" dirty="0"/>
@@ -7521,7 +7521,7 @@
                 <a:ea typeface="Calibri" pitchFamily="34" charset="-122"/>
                 <a:cs typeface="Calibri" pitchFamily="34" charset="-120"/>
               </a:rPr>
-              <a:t>“Go after six, when the little kids have gone home.”</a:t>
+              <a:t>“throw yourself at a padded wall and get cheered for it”</a:t>
             </a:r>
             <a:endParaRPr lang="en-US" sz="2600" dirty="0"/>
           </a:p>
@@ -7558,7 +7558,7 @@
                 <a:ea typeface="Calibri" pitchFamily="34" charset="-122"/>
                 <a:cs typeface="Calibri" pitchFamily="34" charset="-120"/>
               </a:rPr>
-              <a:t>“Staff checked every child’s wristband, the safety talk was clear”</a:t>
+              <a:t>“Go after six, when the little kids have gone home.”</a:t>
             </a:r>
             <a:endParaRPr lang="en-US" sz="2600" dirty="0"/>
           </a:p>
@@ -7632,7 +7632,7 @@
                 <a:ea typeface="Calibri" pitchFamily="34" charset="-122"/>
                 <a:cs typeface="Calibri" pitchFamily="34" charset="-120"/>
               </a:rPr>
-              <a:t>“throw yourself at a padded wall and get cheered for it”</a:t>
+              <a:t>“Staff checked every child’s wristband, the safety talk was clear”</a:t>
             </a:r>
             <a:endParaRPr lang="en-US" sz="2600" dirty="0"/>
           </a:p>
@@ -8999,7 +8999,7 @@
                 <a:ea typeface="Calibri" pitchFamily="34" charset="-122"/>
                 <a:cs typeface="Calibri" pitchFamily="34" charset="-120"/>
               </a:rPr>
-              <a:t>Why am I writing it?</a:t>
+              <a:t>How long should it be?</a:t>
             </a:r>
             <a:endParaRPr lang="en-US" sz="2400" dirty="0"/>
           </a:p>
@@ -9036,7 +9036,7 @@
                 <a:ea typeface="Calibri" pitchFamily="34" charset="-122"/>
                 <a:cs typeface="Calibri" pitchFamily="34" charset="-120"/>
               </a:rPr>
-              <a:t>What type of text is it?</a:t>
+              <a:t>Why am I writing it?</a:t>
             </a:r>
             <a:endParaRPr lang="en-US" sz="2400" dirty="0"/>
           </a:p>
@@ -9073,7 +9073,7 @@
                 <a:ea typeface="Calibri" pitchFamily="34" charset="-122"/>
                 <a:cs typeface="Calibri" pitchFamily="34" charset="-120"/>
               </a:rPr>
-              <a:t>How long should it be?</a:t>
+              <a:t>Who is going to read it?</a:t>
             </a:r>
             <a:endParaRPr lang="en-US" sz="2400" dirty="0"/>
           </a:p>
@@ -9110,7 +9110,7 @@
                 <a:ea typeface="Calibri" pitchFamily="34" charset="-122"/>
                 <a:cs typeface="Calibri" pitchFamily="34" charset="-120"/>
               </a:rPr>
-              <a:t>Who is going to read it?</a:t>
+              <a:t>What type of text is it?</a:t>
             </a:r>
             <a:endParaRPr lang="en-US" sz="2400" dirty="0"/>
           </a:p>
@@ -10085,7 +10085,7 @@
                 <a:ea typeface="Cambria" pitchFamily="34" charset="-122"/>
                 <a:cs typeface="Cambria" pitchFamily="34" charset="-120"/>
               </a:rPr>
-              <a:t>B   “Staff checked every child’s wristband, the safety talk was clear”</a:t>
+              <a:t>D   “Staff checked every child’s wristband, the safety talk was clear”</a:t>
             </a:r>
             <a:endParaRPr lang="en-US" sz="1800" dirty="0"/>
           </a:p>
@@ -10544,7 +10544,7 @@
                 <a:ea typeface="Cambria" pitchFamily="34" charset="-122"/>
                 <a:cs typeface="Cambria" pitchFamily="34" charset="-120"/>
               </a:rPr>
-              <a:t>A   Why am I writing it?</a:t>
+              <a:t>B   Why am I writing it?</a:t>
             </a:r>
             <a:endParaRPr lang="en-US" sz="1800" dirty="0"/>
           </a:p>
@@ -11078,7 +11078,7 @@
                 <a:ea typeface="Calibri" pitchFamily="34" charset="-122"/>
                 <a:cs typeface="Calibri" pitchFamily="34" charset="-120"/>
               </a:rPr>
-              <a:t>Who is going to read it?</a:t>
+              <a:t>What type of text is it?</a:t>
             </a:r>
             <a:endParaRPr lang="en-US" sz="1800" dirty="0"/>
           </a:p>
@@ -11115,7 +11115,7 @@
                 <a:ea typeface="Calibri" pitchFamily="34" charset="-122"/>
                 <a:cs typeface="Calibri" pitchFamily="34" charset="-120"/>
               </a:rPr>
-              <a:t>Why am I writing it?</a:t>
+              <a:t>How long should it be?</a:t>
             </a:r>
             <a:endParaRPr lang="en-US" sz="1800" dirty="0"/>
           </a:p>
@@ -11152,7 +11152,7 @@
                 <a:ea typeface="Calibri" pitchFamily="34" charset="-122"/>
                 <a:cs typeface="Calibri" pitchFamily="34" charset="-120"/>
               </a:rPr>
-              <a:t>What type of text is it?</a:t>
+              <a:t>Why am I writing it?</a:t>
             </a:r>
             <a:endParaRPr lang="en-US" sz="1800" dirty="0"/>
           </a:p>
@@ -11189,7 +11189,7 @@
                 <a:ea typeface="Calibri" pitchFamily="34" charset="-122"/>
                 <a:cs typeface="Calibri" pitchFamily="34" charset="-120"/>
               </a:rPr>
-              <a:t>How long should it be?</a:t>
+              <a:t>Who is going to read it?</a:t>
             </a:r>
             <a:endParaRPr lang="en-US" sz="1800" dirty="0"/>
           </a:p>
@@ -11591,7 +11591,7 @@
                 <a:ea typeface="Calibri" pitchFamily="34" charset="-122"/>
                 <a:cs typeface="Calibri" pitchFamily="34" charset="-120"/>
               </a:rPr>
-              <a:t>To persuade a live crowd to take action</a:t>
+              <a:t>To give step-by-step instructions</a:t>
             </a:r>
             <a:endParaRPr lang="en-US" sz="2200" dirty="0"/>
           </a:p>
@@ -11628,7 +11628,7 @@
                 <a:ea typeface="Calibri" pitchFamily="34" charset="-122"/>
                 <a:cs typeface="Calibri" pitchFamily="34" charset="-120"/>
               </a:rPr>
-              <a:t>To inform the reader about an experience and help them decide</a:t>
+              <a:t>To persuade a live crowd to take action</a:t>
             </a:r>
             <a:endParaRPr lang="en-US" sz="2200" dirty="0"/>
           </a:p>
@@ -11702,7 +11702,7 @@
                 <a:ea typeface="Calibri" pitchFamily="34" charset="-122"/>
                 <a:cs typeface="Calibri" pitchFamily="34" charset="-120"/>
               </a:rPr>
-              <a:t>To give step-by-step instructions</a:t>
+              <a:t>To inform the reader about an experience and help them decide</a:t>
             </a:r>
             <a:endParaRPr lang="en-US" sz="2200" dirty="0"/>
           </a:p>
@@ -12103,7 +12103,7 @@
                 <a:ea typeface="Calibri" pitchFamily="34" charset="-122"/>
                 <a:cs typeface="Calibri" pitchFamily="34" charset="-120"/>
               </a:rPr>
-              <a:t>B   Why am I writing it?</a:t>
+              <a:t>C   Why am I writing it?</a:t>
             </a:r>
             <a:endParaRPr lang="en-US" sz="2200" dirty="0"/>
           </a:p>
@@ -12583,7 +12583,7 @@
                 <a:ea typeface="Calibri" pitchFamily="34" charset="-122"/>
                 <a:cs typeface="Calibri" pitchFamily="34" charset="-120"/>
               </a:rPr>
-              <a:t>B   To inform the reader about an experience and help them decide</a:t>
+              <a:t>D   To inform the reader about an experience and help them decide</a:t>
             </a:r>
             <a:endParaRPr lang="en-US" sz="2200" dirty="0"/>
           </a:p>

--- a/decks/englang-opinion/englang-opinion_ch1_audience-purpose-form.pptx
+++ b/decks/englang-opinion/englang-opinion_ch1_audience-purpose-form.pptx
@@ -125,29 +125,29 @@
   <p:extLst>
     <p:ext uri="{521415D9-36F7-43E2-AB2F-B90AF26B5E84}">
       <p14:sectionLst xmlns:p14="http://schemas.microsoft.com/office/powerpoint/2010/main">
-        <p14:section name="Opening" id="{ed2bc286-2d01-4b85-3285-90f364ec86f7}">
+        <p14:section name="Opening" id="{9a28e46d-5e35-aada-7922-ec18fbc19a5c}">
           <p14:sldIdLst>
             <p14:sldId id="256"/>
           </p14:sldIdLst>
         </p14:section>
-        <p14:section name="Gate" id="{af3a56c1-4a6f-ab85-ccfa-0995a3eda51f}">
+        <p14:section name="Gate" id="{8bcecc17-362a-3200-6d30-5f9bfc9428ce}">
           <p14:sldIdLst>
             <p14:sldId id="257"/>
             <p14:sldId id="258"/>
           </p14:sldIdLst>
         </p14:section>
-        <p14:section name="Pre-teach" id="{c9ee3b58-4d9a-3178-81d9-c9f60ae06643}">
+        <p14:section name="Pre-teach" id="{b1728c25-9ced-5407-e981-e6b837e74dce}">
           <p14:sldIdLst>
             <p14:sldId id="259"/>
           </p14:sldIdLst>
         </p14:section>
-        <p14:section name="Read-along" id="{c720de70-64bb-549c-0e5c-0d3668f10d75}">
+        <p14:section name="Read-along" id="{bb6c5ef1-a28a-5d89-0eae-743d29e9ab7b}">
           <p14:sldIdLst>
             <p14:sldId id="260"/>
             <p14:sldId id="261"/>
           </p14:sldIdLst>
         </p14:section>
-        <p14:section name="Teach" id="{ed13ae23-3e68-0047-9778-659bd428af0b}">
+        <p14:section name="Teach" id="{a3121749-7673-1f7e-977a-c4a056a85808}">
           <p14:sldIdLst>
             <p14:sldId id="262"/>
             <p14:sldId id="263"/>
@@ -156,7 +156,7 @@
             <p14:sldId id="266"/>
           </p14:sldIdLst>
         </p14:section>
-        <p14:section name="Routes" id="{87e47615-409e-9768-9a6e-98b470b3e7f1}">
+        <p14:section name="Routes" id="{b5d1a304-b59a-a93b-3244-af3b0d986b0b}">
           <p14:sldIdLst>
             <p14:sldId id="267"/>
             <p14:sldId id="268"/>
@@ -164,12 +164,12 @@
             <p14:sldId id="270"/>
           </p14:sldIdLst>
         </p14:section>
-        <p14:section name="Close" id="{e66fa65e-559b-1c2d-c83e-c98caedc31f6}">
+        <p14:section name="Close" id="{c740c294-3850-8ff9-a24d-560116d56393}">
           <p14:sldIdLst>
             <p14:sldId id="271"/>
           </p14:sldIdLst>
         </p14:section>
-        <p14:section name="Answers" id="{673c412e-77f2-17f7-2b71-87f2aca2eee2}">
+        <p14:section name="Answers" id="{23082871-4c60-cc67-dfa0-eb063d884558}">
           <p14:sldIdLst>
             <p14:sldId id="272"/>
             <p14:sldId id="273"/>
